--- a/presentation/UNanofabTools/hscdownloader/slides/HSC-Downloader.pptx
+++ b/presentation/UNanofabTools/hscdownloader/slides/HSC-Downloader.pptx
@@ -600,7 +600,7 @@
           <a:p>
             <a:r>
               <a:rPr lang="en-US" dirty="0"/>
-              <a:t>Cover the watch-items honestly. The secret token is currently embedded in the code and should be moved into a protected setting and rotated. There's no alerting, so a CORES outage or token change shows up only as stale machine pages — adding failure alerts is recommended. Each machine is tied to a CORES ID number; if CORES renumbers one, that machine silently stops updating. And a few machines are noted as having no data yet, which is expected. All of this is in the developer notes and issues list.</a:t>
+              <a:t>Cover the watch-items honestly. The secret token has been moved out of the code into a protected setting (.env) and was rotated on 2026-06-29, so that earlier credential-in-source risk is resolved. The main remaining gap is alerting: there's no alert today, so a CORES outage or token change shows up only as stale machine pages — adding failure alerts is recommended. Each machine is tied to a CORES ID number; if CORES renumbers one, that machine silently stops updating. And a few machines are noted as having no data yet, which is expected. All of this is in the developer notes and issues list.</a:t>
             </a:r>
             <a:endParaRPr lang="en-US" dirty="0"/>
           </a:p>
@@ -688,7 +688,7 @@
           <a:p>
             <a:r>
               <a:rPr lang="en-US" dirty="0"/>
-              <a:t>Wrap up. HSCDownloader is the quiet supply line keeping machine data current: download from CORES, reshape, save, repeat. It's essential but low-profile. The two things to improve are moving the access token into a protected setting and adding alerts so silent staleness gets noticed. Questions welcome.</a:t>
+              <a:t>Wrap up. HSCDownloader is the quiet supply line keeping machine data current: download from CORES, reshape, save, repeat. It's essential but low-profile. The access token has been moved into a protected setting and rotated (2026-06-29); the main thing left to improve is adding alerts so silent staleness gets noticed. Questions welcome.</a:t>
             </a:r>
             <a:endParaRPr lang="en-US" dirty="0"/>
           </a:p>
@@ -1040,7 +1040,7 @@
           <a:p>
             <a:r>
               <a:rPr lang="en-US" dirty="0"/>
-              <a:t>Explain the structure. Inside the program, each machine has its own 'recipe' function — saveALD, saveEbeam, and so on — that knows that tool's important columns and formatting. It covers essentially every active major tool: deposition, dry etch, and furnaces. PECVD has code in the file but is disabled in the scheduled save loop. Because each machine is its own function, changing one tool's output is a contained edit. (The flip side: there's a lot of near-duplicate code across them, which the developer notes suggest consolidating.)</a:t>
+              <a:t>Explain the structure. Inside the program, each machine has its own 'recipe' function — saveALD, saveEbeam, and so on — that knows that tool's important columns and formatting. It covers essentially every active major tool: deposition, dry etch, and furnaces. Because each machine is its own function, changing one tool's output is a contained edit. (The flip side: there's a lot of near-duplicate code across them, which the developer notes suggest consolidating.)</a:t>
             </a:r>
             <a:endParaRPr lang="en-US" dirty="0"/>
           </a:p>
@@ -2247,7 +2247,7 @@
                 <a:ea typeface="Calibri" pitchFamily="34" charset="-122"/>
                 <a:cs typeface="Calibri" pitchFamily="34" charset="-120"/>
               </a:rPr>
-              <a:t>Its CORES access token is written into the program — should move to a protected setting.</a:t>
+              <a:t>Its CORES access token now lives in a protected setting (.env) and was rotated 2026-06-29 — no longer in the code.</a:t>
             </a:r>
             <a:endParaRPr lang="en-US" sz="1500" dirty="0"/>
           </a:p>
@@ -2605,7 +2605,7 @@
                 <a:ea typeface="Calibri" pitchFamily="34" charset="-122"/>
                 <a:cs typeface="Calibri" pitchFamily="34" charset="-120"/>
               </a:rPr>
-              <a:t>Watch the embedded token and the lack of failure alerts.</a:t>
+              <a:t>The CORES token is now in a protected setting and rotated; the main remaining watch-item is failure alerts.</a:t>
             </a:r>
             <a:endParaRPr lang="en-US" sz="1500" dirty="0"/>
           </a:p>

--- a/presentation/UNanofabTools/hscdownloader/slides/HSC-Downloader.pptx
+++ b/presentation/UNanofabTools/hscdownloader/slides/HSC-Downloader.pptx
@@ -600,7 +600,7 @@
           <a:p>
             <a:r>
               <a:rPr lang="en-US" dirty="0"/>
-              <a:t>Cover the watch-items honestly. The secret token has been moved out of the code into a protected setting (.env) and was rotated on 2026-06-29, so that earlier credential-in-source risk is resolved. The main remaining gap is alerting: there's no alert today, so a CORES outage or token change shows up only as stale machine pages — adding failure alerts is recommended. Each machine is tied to a CORES ID number; if CORES renumbers one, that machine silently stops updating. And a few machines are noted as having no data yet, which is expected. All of this is in the developer notes and issues list.</a:t>
+              <a:t>Cover the watch-items honestly. The secret token has been moved out of the code into a protected setting (.env) and was rotated on 2026-06-29, so that earlier credential-in-source risk is resolved. Reliability is better too: each machine is now downloaded and saved inside its own safety net, so a single bad response or schema change is logged and skipped instead of aborting the whole run, and the download has a time limit so a stuck CORES request can't freeze the nightly job. The main remaining gap is alerting: there's still no proactive alert, so a sustained CORES outage shows up only as stale machine pages — adding failure alerts is recommended. Each machine is tied to a CORES ID number; if CORES renumbers one, that machine silently stops updating. And a few machines are noted as having no data yet, which is expected. All of this is in the developer notes and issues list.</a:t>
             </a:r>
             <a:endParaRPr lang="en-US" dirty="0"/>
           </a:p>
@@ -2268,7 +2268,28 @@
                 <a:ea typeface="Calibri" pitchFamily="34" charset="-122"/>
                 <a:cs typeface="Calibri" pitchFamily="34" charset="-120"/>
               </a:rPr>
-              <a:t>If CORES is down or the token changes, pages quietly go stale (no alert today).</a:t>
+              <a:t>Each machine runs in its own safety net, so if one fails, the rest still update; the download also has a time limit so it can't hang.</a:t>
+            </a:r>
+            <a:endParaRPr lang="en-US" sz="1500" dirty="0"/>
+          </a:p>
+          <a:p>
+            <a:pPr marL="228600" indent="-228600">
+              <a:spcAft>
+                <a:spcPts val="1000"/>
+              </a:spcAft>
+              <a:buSzPct val="100000"/>
+              <a:buChar char="•"/>
+            </a:pPr>
+            <a:r>
+              <a:rPr lang="en-US" sz="1500" dirty="0">
+                <a:solidFill>
+                  <a:srgbClr val="1A1A1A"/>
+                </a:solidFill>
+                <a:latin typeface="Calibri" pitchFamily="34" charset="0"/>
+                <a:ea typeface="Calibri" pitchFamily="34" charset="-122"/>
+                <a:cs typeface="Calibri" pitchFamily="34" charset="-120"/>
+              </a:rPr>
+              <a:t>If CORES is down or a machine's data is bad, only that machine goes stale — but there's still no proactive alert today.</a:t>
             </a:r>
             <a:endParaRPr lang="en-US" sz="1500" dirty="0"/>
           </a:p>
